--- a/野地百合花.pptx
+++ b/野地百合花.pptx
@@ -2,13 +2,13 @@
 <file path=ppt/presentation.xml><?xml version="1.0" encoding="utf-8"?>
 <p:presentation xmlns:a="http://schemas.openxmlformats.org/drawingml/2006/main" xmlns:r="http://schemas.openxmlformats.org/officeDocument/2006/relationships" xmlns:p="http://schemas.openxmlformats.org/presentationml/2006/main" saveSubsetFonts="1">
   <p:sldMasterIdLst>
-    <p:sldMasterId id="2147483684" r:id="rId1"/>
+    <p:sldMasterId id="2147483696" r:id="rId1"/>
   </p:sldMasterIdLst>
   <p:sldIdLst>
     <p:sldId id="257" r:id="rId2"/>
     <p:sldId id="258" r:id="rId3"/>
   </p:sldIdLst>
-  <p:sldSz cx="9144000" cy="6858000" type="screen4x3"/>
+  <p:sldSz cx="12192000" cy="6858000"/>
   <p:notesSz cx="6858000" cy="9144000"/>
   <p:defaultTextStyle>
     <a:defPPr>
@@ -113,10 +113,6 @@
 </p:presentation>
 </file>
 
-<file path=ppt/revisionInfo.xml><?xml version="1.0" encoding="utf-8"?>
-<p1510:revInfo xmlns:a="http://schemas.openxmlformats.org/drawingml/2006/main" xmlns:r="http://schemas.openxmlformats.org/officeDocument/2006/relationships" xmlns:p1510="http://schemas.microsoft.com/office/powerpoint/2015/10/main"/>
-</file>
-
 <file path=ppt/slideLayouts/slideLayout1.xml><?xml version="1.0" encoding="utf-8"?>
 <p:sldLayout xmlns:a="http://schemas.openxmlformats.org/drawingml/2006/main" xmlns:r="http://schemas.openxmlformats.org/officeDocument/2006/relationships" xmlns:p="http://schemas.openxmlformats.org/presentationml/2006/main" showMasterSp="0" type="title" preserve="1">
   <p:cSld name="Title Slide">
@@ -142,8 +138,8 @@
         </p:nvSpPr>
         <p:spPr>
           <a:xfrm>
-            <a:off x="0" y="0"/>
-            <a:ext cx="9144000" cy="6858000"/>
+            <a:off x="1" y="0"/>
+            <a:ext cx="12192000" cy="6858000"/>
           </a:xfrm>
           <a:prstGeom prst="rect">
             <a:avLst/>
@@ -192,19 +188,20 @@
         </p:nvSpPr>
         <p:spPr>
           <a:xfrm>
-            <a:off x="980902" y="1275025"/>
-            <a:ext cx="7182197" cy="4307950"/>
+            <a:off x="1307870" y="1267730"/>
+            <a:ext cx="9576262" cy="4307950"/>
           </a:xfrm>
           <a:prstGeom prst="rect">
             <a:avLst/>
           </a:prstGeom>
           <a:solidFill>
-            <a:sysClr val="window" lastClr="FFFFFF"/>
+            <a:schemeClr val="tx1"/>
           </a:solidFill>
           <a:ln w="6350" cap="flat" cmpd="sng" algn="ctr">
             <a:solidFill>
               <a:schemeClr val="tx1">
-                <a:lumMod val="75000"/>
+                <a:lumMod val="65000"/>
+                <a:lumOff val="35000"/>
               </a:schemeClr>
             </a:solidFill>
             <a:prstDash val="solid"/>
@@ -227,8 +224,8 @@
         </p:nvSpPr>
         <p:spPr>
           <a:xfrm>
-            <a:off x="1088136" y="1385316"/>
-            <a:ext cx="6967728" cy="4087368"/>
+            <a:off x="1447801" y="1411615"/>
+            <a:ext cx="9296400" cy="4034770"/>
           </a:xfrm>
           <a:prstGeom prst="rect">
             <a:avLst/>
@@ -236,7 +233,7 @@
           <a:solidFill>
             <a:schemeClr val="bg2"/>
           </a:solidFill>
-          <a:ln w="6350" cap="sq" cmpd="sng" algn="ctr">
+          <a:ln w="9525" cap="sq" cmpd="sng" algn="ctr">
             <a:noFill/>
             <a:prstDash val="solid"/>
             <a:miter lim="800000"/>
@@ -252,8 +249,8 @@
         </p:nvSpPr>
         <p:spPr>
           <a:xfrm>
-            <a:off x="3794760" y="1274764"/>
-            <a:ext cx="1554480" cy="640080"/>
+            <a:off x="5135880" y="1267730"/>
+            <a:ext cx="1920240" cy="731520"/>
           </a:xfrm>
           <a:prstGeom prst="rect">
             <a:avLst/>
@@ -265,7 +262,7 @@
             <a:noFill/>
           </a:ln>
           <a:effectLst>
-            <a:outerShdw blurRad="38100" dist="6350" dir="5400000" algn="t" rotWithShape="0">
+            <a:outerShdw blurRad="50800" dist="12700" dir="5400000" algn="t" rotWithShape="0">
               <a:prstClr val="black">
                 <a:alpha val="40000"/>
               </a:prstClr>
@@ -297,8 +294,8 @@
         </p:nvGrpSpPr>
         <p:grpSpPr>
           <a:xfrm>
-            <a:off x="3886200" y="1274765"/>
-            <a:ext cx="1371600" cy="548640"/>
+            <a:off x="5250180" y="1267730"/>
+            <a:ext cx="1691640" cy="645295"/>
             <a:chOff x="5318306" y="1386268"/>
             <a:chExt cx="1567331" cy="645295"/>
           </a:xfrm>
@@ -442,8 +439,8 @@
         </p:nvSpPr>
         <p:spPr>
           <a:xfrm>
-            <a:off x="1171281" y="2091263"/>
-            <a:ext cx="6801440" cy="2590800"/>
+            <a:off x="1561708" y="2091263"/>
+            <a:ext cx="9068586" cy="2590800"/>
           </a:xfrm>
         </p:spPr>
         <p:txBody>
@@ -455,12 +452,9 @@
               <a:lnSpc>
                 <a:spcPct val="83000"/>
               </a:lnSpc>
-              <a:defRPr kumimoji="0" lang="en-US" sz="6200" b="0" i="0" u="none" strike="noStrike" kern="1200" cap="all" spc="-100" normalizeH="0" baseline="0">
-                <a:ln>
-                  <a:noFill/>
-                </a:ln>
-                <a:solidFill>
-                  <a:sysClr val="window" lastClr="FFFFFF"/>
+              <a:defRPr lang="en-US" sz="7200" b="0" kern="1200" cap="all" spc="-100" baseline="0" dirty="0">
+                <a:solidFill>
+                  <a:schemeClr val="tx1"/>
                 </a:solidFill>
                 <a:effectLst>
                   <a:outerShdw blurRad="38100" dist="12700" dir="2700000" algn="tl" rotWithShape="0">
@@ -469,8 +463,6 @@
                     </a:prstClr>
                   </a:outerShdw>
                 </a:effectLst>
-                <a:uLnTx/>
-                <a:uFillTx/>
                 <a:latin typeface="+mj-lt"/>
                 <a:ea typeface="+mn-ea"/>
                 <a:cs typeface="+mn-cs"/>
@@ -498,8 +490,8 @@
         </p:nvSpPr>
         <p:spPr>
           <a:xfrm>
-            <a:off x="1171575" y="4682062"/>
-            <a:ext cx="6803136" cy="502920"/>
+            <a:off x="1562100" y="4682062"/>
+            <a:ext cx="9070848" cy="457201"/>
           </a:xfrm>
         </p:spPr>
         <p:txBody>
@@ -512,7 +504,7 @@
                 <a:spcPts val="0"/>
               </a:spcBef>
               <a:buNone/>
-              <a:defRPr sz="1400" spc="80" baseline="0">
+              <a:defRPr sz="1600" spc="80" baseline="0">
                 <a:solidFill>
                   <a:schemeClr val="tx2"/>
                 </a:solidFill>
@@ -520,35 +512,35 @@
             </a:lvl1pPr>
             <a:lvl2pPr marL="457200" indent="0" algn="ctr">
               <a:buNone/>
-              <a:defRPr sz="1400"/>
+              <a:defRPr sz="1600"/>
             </a:lvl2pPr>
             <a:lvl3pPr marL="914400" indent="0" algn="ctr">
               <a:buNone/>
-              <a:defRPr sz="1400"/>
+              <a:defRPr sz="1600"/>
             </a:lvl3pPr>
             <a:lvl4pPr marL="1371600" indent="0" algn="ctr">
               <a:buNone/>
-              <a:defRPr sz="1400"/>
+              <a:defRPr sz="1600"/>
             </a:lvl4pPr>
             <a:lvl5pPr marL="1828800" indent="0" algn="ctr">
               <a:buNone/>
-              <a:defRPr sz="1400"/>
+              <a:defRPr sz="1600"/>
             </a:lvl5pPr>
             <a:lvl6pPr marL="2286000" indent="0" algn="ctr">
               <a:buNone/>
-              <a:defRPr sz="1400"/>
+              <a:defRPr sz="1600"/>
             </a:lvl6pPr>
             <a:lvl7pPr marL="2743200" indent="0" algn="ctr">
               <a:buNone/>
-              <a:defRPr sz="1400"/>
+              <a:defRPr sz="1600"/>
             </a:lvl7pPr>
             <a:lvl8pPr marL="3200400" indent="0" algn="ctr">
               <a:buNone/>
-              <a:defRPr sz="1400"/>
+              <a:defRPr sz="1600"/>
             </a:lvl8pPr>
             <a:lvl9pPr marL="3657600" indent="0" algn="ctr">
               <a:buNone/>
-              <a:defRPr sz="1400"/>
+              <a:defRPr sz="1600"/>
             </a:lvl9pPr>
           </a:lstStyle>
           <a:p>
@@ -572,15 +564,15 @@
         </p:nvSpPr>
         <p:spPr>
           <a:xfrm>
-            <a:off x="3931920" y="1334222"/>
-            <a:ext cx="1280160" cy="457200"/>
+            <a:off x="5318760" y="1341255"/>
+            <a:ext cx="1554480" cy="527213"/>
           </a:xfrm>
         </p:spPr>
         <p:txBody>
           <a:bodyPr/>
           <a:lstStyle>
             <a:lvl1pPr algn="ctr">
-              <a:defRPr sz="1100" spc="0" baseline="0">
+              <a:defRPr sz="1300" spc="0" baseline="0">
                 <a:solidFill>
                   <a:srgbClr val="FFFFFF"/>
                 </a:solidFill>
@@ -591,7 +583,7 @@
           <a:p>
             <a:fld id="{682E5B6C-D874-45B4-A5BD-CCF67EEC8929}" type="datetimeFigureOut">
               <a:rPr lang="en-US" smtClean="0"/>
-              <a:t>2/3/2018</a:t>
+              <a:t>6/26/2024</a:t>
             </a:fld>
             <a:endParaRPr lang="en-US"/>
           </a:p>
@@ -609,15 +601,15 @@
         </p:nvSpPr>
         <p:spPr>
           <a:xfrm>
-            <a:off x="1104936" y="5211060"/>
-            <a:ext cx="4429125" cy="228600"/>
+            <a:off x="1453896" y="5212080"/>
+            <a:ext cx="5905500" cy="228600"/>
           </a:xfrm>
         </p:spPr>
         <p:txBody>
           <a:bodyPr/>
           <a:lstStyle>
             <a:lvl1pPr algn="l">
-              <a:defRPr sz="900">
+              <a:defRPr>
                 <a:solidFill>
                   <a:schemeClr val="tx2"/>
                 </a:solidFill>
@@ -641,8 +633,8 @@
         </p:nvSpPr>
         <p:spPr>
           <a:xfrm>
-            <a:off x="6455190" y="5212080"/>
-            <a:ext cx="1583911" cy="228600"/>
+            <a:off x="8606919" y="5212080"/>
+            <a:ext cx="2111881" cy="228600"/>
           </a:xfrm>
         </p:spPr>
         <p:txBody>
@@ -668,7 +660,7 @@
     </p:spTree>
     <p:extLst>
       <p:ext uri="{BB962C8B-B14F-4D97-AF65-F5344CB8AC3E}">
-        <p14:creationId xmlns:p14="http://schemas.microsoft.com/office/powerpoint/2010/main" val="1735992365"/>
+        <p14:creationId xmlns:p14="http://schemas.microsoft.com/office/powerpoint/2010/main" val="4046035232"/>
       </p:ext>
     </p:extLst>
   </p:cSld>
@@ -736,7 +728,7 @@
             <a:pPr lvl="0"/>
             <a:r>
               <a:rPr lang="en-US"/>
-              <a:t>Edit Master text styles</a:t>
+              <a:t>Click to edit Master text styles</a:t>
             </a:r>
           </a:p>
           <a:p>
@@ -783,11 +775,19 @@
         <p:spPr/>
         <p:txBody>
           <a:bodyPr/>
-          <a:lstStyle/>
+          <a:lstStyle>
+            <a:lvl1pPr>
+              <a:defRPr>
+                <a:solidFill>
+                  <a:schemeClr val="tx2"/>
+                </a:solidFill>
+              </a:defRPr>
+            </a:lvl1pPr>
+          </a:lstStyle>
           <a:p>
             <a:fld id="{682E5B6C-D874-45B4-A5BD-CCF67EEC8929}" type="datetimeFigureOut">
               <a:rPr lang="en-US" smtClean="0"/>
-              <a:t>2/3/2018</a:t>
+              <a:t>6/26/2024</a:t>
             </a:fld>
             <a:endParaRPr lang="en-US"/>
           </a:p>
@@ -806,7 +806,15 @@
         <p:spPr/>
         <p:txBody>
           <a:bodyPr/>
-          <a:lstStyle/>
+          <a:lstStyle>
+            <a:lvl1pPr>
+              <a:defRPr>
+                <a:solidFill>
+                  <a:schemeClr val="tx2"/>
+                </a:solidFill>
+              </a:defRPr>
+            </a:lvl1pPr>
+          </a:lstStyle>
           <a:p>
             <a:endParaRPr lang="en-US"/>
           </a:p>
@@ -825,7 +833,15 @@
         <p:spPr/>
         <p:txBody>
           <a:bodyPr/>
-          <a:lstStyle/>
+          <a:lstStyle>
+            <a:lvl1pPr>
+              <a:defRPr>
+                <a:solidFill>
+                  <a:schemeClr val="tx2"/>
+                </a:solidFill>
+              </a:defRPr>
+            </a:lvl1pPr>
+          </a:lstStyle>
           <a:p>
             <a:fld id="{12FA3C2C-542D-4D99-AE8B-F35A3E96CE86}" type="slidenum">
               <a:rPr lang="en-US" smtClean="0"/>
@@ -838,7 +854,7 @@
     </p:spTree>
     <p:extLst>
       <p:ext uri="{BB962C8B-B14F-4D97-AF65-F5344CB8AC3E}">
-        <p14:creationId xmlns:p14="http://schemas.microsoft.com/office/powerpoint/2010/main" val="3053800377"/>
+        <p14:creationId xmlns:p14="http://schemas.microsoft.com/office/powerpoint/2010/main" val="2857469574"/>
       </p:ext>
     </p:extLst>
   </p:cSld>
@@ -877,8 +893,8 @@
         </p:nvSpPr>
         <p:spPr>
           <a:xfrm>
-            <a:off x="6743700" y="762000"/>
-            <a:ext cx="1771650" cy="5257800"/>
+            <a:off x="8991600" y="762000"/>
+            <a:ext cx="2362200" cy="5257800"/>
           </a:xfrm>
         </p:spPr>
         <p:txBody>
@@ -905,8 +921,8 @@
         </p:nvSpPr>
         <p:spPr>
           <a:xfrm>
-            <a:off x="628650" y="762000"/>
-            <a:ext cx="6057900" cy="5257800"/>
+            <a:off x="838200" y="762000"/>
+            <a:ext cx="8077200" cy="5257800"/>
           </a:xfrm>
         </p:spPr>
         <p:txBody>
@@ -916,7 +932,7 @@
             <a:pPr lvl="0"/>
             <a:r>
               <a:rPr lang="en-US"/>
-              <a:t>Edit Master text styles</a:t>
+              <a:t>Click to edit Master text styles</a:t>
             </a:r>
           </a:p>
           <a:p>
@@ -963,11 +979,19 @@
         <p:spPr/>
         <p:txBody>
           <a:bodyPr/>
-          <a:lstStyle/>
+          <a:lstStyle>
+            <a:lvl1pPr>
+              <a:defRPr>
+                <a:solidFill>
+                  <a:schemeClr val="tx2"/>
+                </a:solidFill>
+              </a:defRPr>
+            </a:lvl1pPr>
+          </a:lstStyle>
           <a:p>
             <a:fld id="{682E5B6C-D874-45B4-A5BD-CCF67EEC8929}" type="datetimeFigureOut">
               <a:rPr lang="en-US" smtClean="0"/>
-              <a:t>2/3/2018</a:t>
+              <a:t>6/26/2024</a:t>
             </a:fld>
             <a:endParaRPr lang="en-US"/>
           </a:p>
@@ -986,7 +1010,15 @@
         <p:spPr/>
         <p:txBody>
           <a:bodyPr/>
-          <a:lstStyle/>
+          <a:lstStyle>
+            <a:lvl1pPr>
+              <a:defRPr>
+                <a:solidFill>
+                  <a:schemeClr val="tx2"/>
+                </a:solidFill>
+              </a:defRPr>
+            </a:lvl1pPr>
+          </a:lstStyle>
           <a:p>
             <a:endParaRPr lang="en-US"/>
           </a:p>
@@ -1005,7 +1037,15 @@
         <p:spPr/>
         <p:txBody>
           <a:bodyPr/>
-          <a:lstStyle/>
+          <a:lstStyle>
+            <a:lvl1pPr>
+              <a:defRPr>
+                <a:solidFill>
+                  <a:schemeClr val="tx2"/>
+                </a:solidFill>
+              </a:defRPr>
+            </a:lvl1pPr>
+          </a:lstStyle>
           <a:p>
             <a:fld id="{12FA3C2C-542D-4D99-AE8B-F35A3E96CE86}" type="slidenum">
               <a:rPr lang="en-US" smtClean="0"/>
@@ -1018,7 +1058,7 @@
     </p:spTree>
     <p:extLst>
       <p:ext uri="{BB962C8B-B14F-4D97-AF65-F5344CB8AC3E}">
-        <p14:creationId xmlns:p14="http://schemas.microsoft.com/office/powerpoint/2010/main" val="1291872506"/>
+        <p14:creationId xmlns:p14="http://schemas.microsoft.com/office/powerpoint/2010/main" val="798215165"/>
       </p:ext>
     </p:extLst>
   </p:cSld>
@@ -1031,6 +1071,14 @@
 <file path=ppt/slideLayouts/slideLayout2.xml><?xml version="1.0" encoding="utf-8"?>
 <p:sldLayout xmlns:a="http://schemas.openxmlformats.org/drawingml/2006/main" xmlns:r="http://schemas.openxmlformats.org/officeDocument/2006/relationships" xmlns:p="http://schemas.openxmlformats.org/presentationml/2006/main" type="obj" preserve="1">
   <p:cSld name="Title and Content">
+    <p:bg>
+      <p:bgPr>
+        <a:solidFill>
+          <a:schemeClr val="tx1"/>
+        </a:solidFill>
+        <a:effectLst/>
+      </p:bgPr>
+    </p:bg>
     <p:spTree>
       <p:nvGrpSpPr>
         <p:cNvPr id="1" name=""/>
@@ -1081,12 +1129,16 @@
         <p:spPr/>
         <p:txBody>
           <a:bodyPr/>
-          <a:lstStyle/>
+          <a:lstStyle>
+            <a:lvl1pPr>
+              <a:defRPr sz="1800"/>
+            </a:lvl1pPr>
+          </a:lstStyle>
           <a:p>
             <a:pPr lvl="0"/>
             <a:r>
               <a:rPr lang="en-US"/>
-              <a:t>Edit Master text styles</a:t>
+              <a:t>Click to edit Master text styles</a:t>
             </a:r>
           </a:p>
           <a:p>
@@ -1122,7 +1174,7 @@
       </p:sp>
       <p:sp>
         <p:nvSpPr>
-          <p:cNvPr id="7" name="Date Placeholder 6"/>
+          <p:cNvPr id="4" name="Date Placeholder 3"/>
           <p:cNvSpPr>
             <a:spLocks noGrp="1"/>
           </p:cNvSpPr>
@@ -1133,11 +1185,19 @@
         <p:spPr/>
         <p:txBody>
           <a:bodyPr/>
-          <a:lstStyle/>
+          <a:lstStyle>
+            <a:lvl1pPr>
+              <a:defRPr>
+                <a:solidFill>
+                  <a:schemeClr val="tx2"/>
+                </a:solidFill>
+              </a:defRPr>
+            </a:lvl1pPr>
+          </a:lstStyle>
           <a:p>
             <a:fld id="{682E5B6C-D874-45B4-A5BD-CCF67EEC8929}" type="datetimeFigureOut">
               <a:rPr lang="en-US" smtClean="0"/>
-              <a:t>2/3/2018</a:t>
+              <a:t>6/26/2024</a:t>
             </a:fld>
             <a:endParaRPr lang="en-US"/>
           </a:p>
@@ -1145,7 +1205,7 @@
       </p:sp>
       <p:sp>
         <p:nvSpPr>
-          <p:cNvPr id="8" name="Footer Placeholder 7"/>
+          <p:cNvPr id="5" name="Footer Placeholder 4"/>
           <p:cNvSpPr>
             <a:spLocks noGrp="1"/>
           </p:cNvSpPr>
@@ -1156,7 +1216,15 @@
         <p:spPr/>
         <p:txBody>
           <a:bodyPr/>
-          <a:lstStyle/>
+          <a:lstStyle>
+            <a:lvl1pPr>
+              <a:defRPr>
+                <a:solidFill>
+                  <a:schemeClr val="tx2"/>
+                </a:solidFill>
+              </a:defRPr>
+            </a:lvl1pPr>
+          </a:lstStyle>
           <a:p>
             <a:endParaRPr lang="en-US"/>
           </a:p>
@@ -1164,7 +1232,7 @@
       </p:sp>
       <p:sp>
         <p:nvSpPr>
-          <p:cNvPr id="9" name="Slide Number Placeholder 8"/>
+          <p:cNvPr id="6" name="Slide Number Placeholder 5"/>
           <p:cNvSpPr>
             <a:spLocks noGrp="1"/>
           </p:cNvSpPr>
@@ -1175,7 +1243,15 @@
         <p:spPr/>
         <p:txBody>
           <a:bodyPr/>
-          <a:lstStyle/>
+          <a:lstStyle>
+            <a:lvl1pPr>
+              <a:defRPr>
+                <a:solidFill>
+                  <a:schemeClr val="tx2"/>
+                </a:solidFill>
+              </a:defRPr>
+            </a:lvl1pPr>
+          </a:lstStyle>
           <a:p>
             <a:fld id="{12FA3C2C-542D-4D99-AE8B-F35A3E96CE86}" type="slidenum">
               <a:rPr lang="en-US" smtClean="0"/>
@@ -1188,7 +1264,7 @@
     </p:spTree>
     <p:extLst>
       <p:ext uri="{BB962C8B-B14F-4D97-AF65-F5344CB8AC3E}">
-        <p14:creationId xmlns:p14="http://schemas.microsoft.com/office/powerpoint/2010/main" val="730884093"/>
+        <p14:creationId xmlns:p14="http://schemas.microsoft.com/office/powerpoint/2010/main" val="1168809797"/>
       </p:ext>
     </p:extLst>
   </p:cSld>
@@ -1217,14 +1293,14 @@
       </p:grpSpPr>
       <p:sp>
         <p:nvSpPr>
-          <p:cNvPr id="22" name="Rectangle 21"/>
+          <p:cNvPr id="19" name="Rectangle 18"/>
           <p:cNvSpPr/>
           <p:nvPr/>
         </p:nvSpPr>
         <p:spPr>
           <a:xfrm>
             <a:off x="0" y="0"/>
-            <a:ext cx="9144000" cy="6858000"/>
+            <a:ext cx="12192000" cy="6858000"/>
           </a:xfrm>
           <a:prstGeom prst="rect">
             <a:avLst/>
@@ -1273,8 +1349,8 @@
         </p:nvSpPr>
         <p:spPr>
           <a:xfrm>
-            <a:off x="980902" y="1275025"/>
-            <a:ext cx="7182197" cy="4307950"/>
+            <a:off x="1307870" y="1267730"/>
+            <a:ext cx="9576262" cy="4307950"/>
           </a:xfrm>
           <a:prstGeom prst="rect">
             <a:avLst/>
@@ -1285,7 +1361,8 @@
           <a:ln w="6350" cap="flat" cmpd="sng" algn="ctr">
             <a:solidFill>
               <a:schemeClr val="tx1">
-                <a:lumMod val="75000"/>
+                <a:lumMod val="65000"/>
+                <a:lumOff val="35000"/>
               </a:schemeClr>
             </a:solidFill>
             <a:prstDash val="solid"/>
@@ -1308,8 +1385,8 @@
         </p:nvSpPr>
         <p:spPr>
           <a:xfrm>
-            <a:off x="1088136" y="1385316"/>
-            <a:ext cx="6967728" cy="4087368"/>
+            <a:off x="1447801" y="1411615"/>
+            <a:ext cx="9296400" cy="4034770"/>
           </a:xfrm>
           <a:prstGeom prst="rect">
             <a:avLst/>
@@ -1317,7 +1394,7 @@
           <a:solidFill>
             <a:schemeClr val="bg2"/>
           </a:solidFill>
-          <a:ln w="6350" cap="sq" cmpd="sng" algn="ctr">
+          <a:ln w="9525" cap="sq" cmpd="sng" algn="ctr">
             <a:noFill/>
             <a:prstDash val="solid"/>
             <a:miter lim="800000"/>
@@ -1333,8 +1410,8 @@
         </p:nvSpPr>
         <p:spPr>
           <a:xfrm>
-            <a:off x="3794760" y="1274764"/>
-            <a:ext cx="1554480" cy="640080"/>
+            <a:off x="5135880" y="1267730"/>
+            <a:ext cx="1920240" cy="731520"/>
           </a:xfrm>
           <a:prstGeom prst="rect">
             <a:avLst/>
@@ -1346,7 +1423,7 @@
             <a:noFill/>
           </a:ln>
           <a:effectLst>
-            <a:outerShdw blurRad="38100" dist="6350" dir="5400000" algn="t" rotWithShape="0">
+            <a:outerShdw blurRad="50800" dist="12700" dir="5400000" algn="t" rotWithShape="0">
               <a:prstClr val="black">
                 <a:alpha val="40000"/>
               </a:prstClr>
@@ -1378,8 +1455,8 @@
         </p:nvGrpSpPr>
         <p:grpSpPr>
           <a:xfrm>
-            <a:off x="3886200" y="1274765"/>
-            <a:ext cx="1371600" cy="548640"/>
+            <a:off x="5250180" y="1267730"/>
+            <a:ext cx="1691640" cy="645295"/>
             <a:chOff x="5318306" y="1386268"/>
             <a:chExt cx="1567331" cy="645295"/>
           </a:xfrm>
@@ -1523,8 +1600,8 @@
         </p:nvSpPr>
         <p:spPr>
           <a:xfrm>
-            <a:off x="1172717" y="2094309"/>
-            <a:ext cx="6803136" cy="2587752"/>
+            <a:off x="1563623" y="2094309"/>
+            <a:ext cx="9070848" cy="2587752"/>
           </a:xfrm>
         </p:spPr>
         <p:txBody>
@@ -1536,12 +1613,9 @@
               <a:lnSpc>
                 <a:spcPct val="83000"/>
               </a:lnSpc>
-              <a:defRPr kumimoji="0" lang="en-US" sz="6200" b="0" i="0" u="none" strike="noStrike" kern="1200" cap="all" spc="-100" normalizeH="0" baseline="0" dirty="0">
-                <a:ln>
-                  <a:noFill/>
-                </a:ln>
-                <a:solidFill>
-                  <a:sysClr val="window" lastClr="FFFFFF"/>
+              <a:defRPr lang="en-US" sz="7200" b="0" kern="1200" cap="all" spc="-100" baseline="0" dirty="0">
+                <a:solidFill>
+                  <a:schemeClr val="tx1"/>
                 </a:solidFill>
                 <a:effectLst>
                   <a:outerShdw blurRad="38100" dist="12700" dir="2700000" algn="tl" rotWithShape="0">
@@ -1550,8 +1624,9 @@
                     </a:prstClr>
                   </a:outerShdw>
                 </a:effectLst>
-                <a:uLnTx/>
-                <a:uFillTx/>
+                <a:latin typeface="+mj-lt"/>
+                <a:ea typeface="+mn-ea"/>
+                <a:cs typeface="+mn-cs"/>
               </a:defRPr>
             </a:lvl1pPr>
           </a:lstStyle>
@@ -1576,8 +1651,8 @@
         </p:nvSpPr>
         <p:spPr>
           <a:xfrm>
-            <a:off x="1172718" y="4682062"/>
-            <a:ext cx="6803136" cy="502920"/>
+            <a:off x="1563624" y="4682062"/>
+            <a:ext cx="9070848" cy="457200"/>
           </a:xfrm>
         </p:spPr>
         <p:txBody>
@@ -1587,7 +1662,10 @@
           <a:lstStyle>
             <a:lvl1pPr marL="0" indent="0" algn="ctr">
               <a:buNone/>
-              <a:defRPr sz="1400">
+              <a:tabLst>
+                <a:tab pos="2633663" algn="l"/>
+              </a:tabLst>
+              <a:defRPr sz="1600">
                 <a:solidFill>
                   <a:schemeClr val="tx2"/>
                 </a:solidFill>
@@ -1596,7 +1674,7 @@
             </a:lvl1pPr>
             <a:lvl2pPr marL="457200" indent="0">
               <a:buNone/>
-              <a:defRPr sz="1400">
+              <a:defRPr sz="1600">
                 <a:solidFill>
                   <a:schemeClr val="tx1">
                     <a:tint val="75000"/>
@@ -1606,7 +1684,7 @@
             </a:lvl2pPr>
             <a:lvl3pPr marL="914400" indent="0">
               <a:buNone/>
-              <a:defRPr sz="1400">
+              <a:defRPr sz="1600">
                 <a:solidFill>
                   <a:schemeClr val="tx1">
                     <a:tint val="75000"/>
@@ -1679,7 +1757,7 @@
             <a:pPr lvl="0"/>
             <a:r>
               <a:rPr lang="en-US"/>
-              <a:t>Edit Master text styles</a:t>
+              <a:t>Click to edit Master text styles</a:t>
             </a:r>
           </a:p>
         </p:txBody>
@@ -1696,15 +1774,15 @@
         </p:nvSpPr>
         <p:spPr>
           <a:xfrm>
-            <a:off x="3931920" y="1332914"/>
-            <a:ext cx="1280160" cy="457200"/>
+            <a:off x="5321808" y="1344502"/>
+            <a:ext cx="1554480" cy="530352"/>
           </a:xfrm>
         </p:spPr>
         <p:txBody>
           <a:bodyPr/>
           <a:lstStyle>
             <a:lvl1pPr algn="ctr">
-              <a:defRPr lang="en-US" sz="1100" kern="1200" spc="0" baseline="0">
+              <a:defRPr lang="en-US" sz="1300" kern="1200" spc="0" baseline="0">
                 <a:solidFill>
                   <a:srgbClr val="FFFFFF"/>
                 </a:solidFill>
@@ -1717,7 +1795,7 @@
           <a:p>
             <a:fld id="{682E5B6C-D874-45B4-A5BD-CCF67EEC8929}" type="datetimeFigureOut">
               <a:rPr lang="en-US" smtClean="0"/>
-              <a:t>2/3/2018</a:t>
+              <a:t>6/26/2024</a:t>
             </a:fld>
             <a:endParaRPr lang="en-US"/>
           </a:p>
@@ -1735,8 +1813,8 @@
         </p:nvSpPr>
         <p:spPr>
           <a:xfrm>
-            <a:off x="1104679" y="5211060"/>
-            <a:ext cx="4430268" cy="228600"/>
+            <a:off x="1453896" y="5212080"/>
+            <a:ext cx="5907024" cy="228600"/>
           </a:xfrm>
         </p:spPr>
         <p:txBody>
@@ -1767,8 +1845,8 @@
         </p:nvSpPr>
         <p:spPr>
           <a:xfrm>
-            <a:off x="6453378" y="5211060"/>
-            <a:ext cx="1584198" cy="228600"/>
+            <a:off x="8604504" y="5212080"/>
+            <a:ext cx="2112264" cy="228600"/>
           </a:xfrm>
         </p:spPr>
         <p:txBody>
@@ -1794,7 +1872,7 @@
     </p:spTree>
     <p:extLst>
       <p:ext uri="{BB962C8B-B14F-4D97-AF65-F5344CB8AC3E}">
-        <p14:creationId xmlns:p14="http://schemas.microsoft.com/office/powerpoint/2010/main" val="2691850138"/>
+        <p14:creationId xmlns:p14="http://schemas.microsoft.com/office/powerpoint/2010/main" val="265718900"/>
       </p:ext>
     </p:extLst>
   </p:cSld>
@@ -1823,7 +1901,7 @@
       </p:grpSpPr>
       <p:sp>
         <p:nvSpPr>
-          <p:cNvPr id="2" name="Title 1"/>
+          <p:cNvPr id="8" name="Title 7"/>
           <p:cNvSpPr>
             <a:spLocks noGrp="1"/>
           </p:cNvSpPr>
@@ -1856,8 +1934,8 @@
         </p:nvSpPr>
         <p:spPr>
           <a:xfrm>
-            <a:off x="731520" y="2103120"/>
-            <a:ext cx="3657600" cy="3931920"/>
+            <a:off x="1066800" y="2103120"/>
+            <a:ext cx="4754880" cy="3749040"/>
           </a:xfrm>
         </p:spPr>
         <p:txBody>
@@ -1895,7 +1973,7 @@
             <a:pPr lvl="0"/>
             <a:r>
               <a:rPr lang="en-US"/>
-              <a:t>Edit Master text styles</a:t>
+              <a:t>Click to edit Master text styles</a:t>
             </a:r>
           </a:p>
           <a:p>
@@ -1941,8 +2019,8 @@
         </p:nvSpPr>
         <p:spPr>
           <a:xfrm>
-            <a:off x="4754880" y="2103120"/>
-            <a:ext cx="3657600" cy="3931920"/>
+            <a:off x="6370320" y="2103120"/>
+            <a:ext cx="4754880" cy="3749040"/>
           </a:xfrm>
         </p:spPr>
         <p:txBody>
@@ -1980,7 +2058,7 @@
             <a:pPr lvl="0"/>
             <a:r>
               <a:rPr lang="en-US"/>
-              <a:t>Edit Master text styles</a:t>
+              <a:t>Click to edit Master text styles</a:t>
             </a:r>
           </a:p>
           <a:p>
@@ -2027,11 +2105,19 @@
         <p:spPr/>
         <p:txBody>
           <a:bodyPr/>
-          <a:lstStyle/>
+          <a:lstStyle>
+            <a:lvl1pPr>
+              <a:defRPr>
+                <a:solidFill>
+                  <a:schemeClr val="tx2"/>
+                </a:solidFill>
+              </a:defRPr>
+            </a:lvl1pPr>
+          </a:lstStyle>
           <a:p>
             <a:fld id="{682E5B6C-D874-45B4-A5BD-CCF67EEC8929}" type="datetimeFigureOut">
               <a:rPr lang="en-US" smtClean="0"/>
-              <a:t>2/3/2018</a:t>
+              <a:t>6/26/2024</a:t>
             </a:fld>
             <a:endParaRPr lang="en-US"/>
           </a:p>
@@ -2050,7 +2136,15 @@
         <p:spPr/>
         <p:txBody>
           <a:bodyPr/>
-          <a:lstStyle/>
+          <a:lstStyle>
+            <a:lvl1pPr>
+              <a:defRPr>
+                <a:solidFill>
+                  <a:schemeClr val="tx2"/>
+                </a:solidFill>
+              </a:defRPr>
+            </a:lvl1pPr>
+          </a:lstStyle>
           <a:p>
             <a:endParaRPr lang="en-US"/>
           </a:p>
@@ -2069,7 +2163,15 @@
         <p:spPr/>
         <p:txBody>
           <a:bodyPr/>
-          <a:lstStyle/>
+          <a:lstStyle>
+            <a:lvl1pPr>
+              <a:defRPr>
+                <a:solidFill>
+                  <a:schemeClr val="tx2"/>
+                </a:solidFill>
+              </a:defRPr>
+            </a:lvl1pPr>
+          </a:lstStyle>
           <a:p>
             <a:fld id="{12FA3C2C-542D-4D99-AE8B-F35A3E96CE86}" type="slidenum">
               <a:rPr lang="en-US" smtClean="0"/>
@@ -2082,7 +2184,7 @@
     </p:spTree>
     <p:extLst>
       <p:ext uri="{BB962C8B-B14F-4D97-AF65-F5344CB8AC3E}">
-        <p14:creationId xmlns:p14="http://schemas.microsoft.com/office/powerpoint/2010/main" val="3467898607"/>
+        <p14:creationId xmlns:p14="http://schemas.microsoft.com/office/powerpoint/2010/main" val="3537115787"/>
       </p:ext>
     </p:extLst>
   </p:cSld>
@@ -2144,8 +2246,8 @@
         </p:nvSpPr>
         <p:spPr>
           <a:xfrm>
-            <a:off x="731520" y="2074334"/>
-            <a:ext cx="3657600" cy="640080"/>
+            <a:off x="1069848" y="2074334"/>
+            <a:ext cx="4754880" cy="640080"/>
           </a:xfrm>
         </p:spPr>
         <p:txBody>
@@ -2158,7 +2260,7 @@
                 <a:spcPts val="0"/>
               </a:spcBef>
               <a:buNone/>
-              <a:defRPr sz="1900" b="0">
+              <a:defRPr sz="1800" b="0">
                 <a:solidFill>
                   <a:schemeClr val="tx2"/>
                 </a:solidFill>
@@ -2167,7 +2269,7 @@
             </a:lvl1pPr>
             <a:lvl2pPr marL="457200" indent="0">
               <a:buNone/>
-              <a:defRPr sz="1900" b="1"/>
+              <a:defRPr sz="1800" b="1"/>
             </a:lvl2pPr>
             <a:lvl3pPr marL="914400" indent="0">
               <a:buNone/>
@@ -2202,7 +2304,7 @@
             <a:pPr lvl="0"/>
             <a:r>
               <a:rPr lang="en-US"/>
-              <a:t>Edit Master text styles</a:t>
+              <a:t>Click to edit Master text styles</a:t>
             </a:r>
           </a:p>
         </p:txBody>
@@ -2219,8 +2321,8 @@
         </p:nvSpPr>
         <p:spPr>
           <a:xfrm>
-            <a:off x="731520" y="2755898"/>
-            <a:ext cx="3657600" cy="3200400"/>
+            <a:off x="1069848" y="2755898"/>
+            <a:ext cx="4754880" cy="3200400"/>
           </a:xfrm>
         </p:spPr>
         <p:txBody>
@@ -2258,7 +2360,7 @@
             <a:pPr lvl="0"/>
             <a:r>
               <a:rPr lang="en-US"/>
-              <a:t>Edit Master text styles</a:t>
+              <a:t>Click to edit Master text styles</a:t>
             </a:r>
           </a:p>
           <a:p>
@@ -2304,8 +2406,8 @@
         </p:nvSpPr>
         <p:spPr>
           <a:xfrm>
-            <a:off x="4754880" y="2074334"/>
-            <a:ext cx="3657600" cy="640080"/>
+            <a:off x="6373368" y="2074334"/>
+            <a:ext cx="4754880" cy="640080"/>
           </a:xfrm>
         </p:spPr>
         <p:txBody>
@@ -2318,7 +2420,7 @@
                 <a:spcPts val="0"/>
               </a:spcBef>
               <a:buNone/>
-              <a:defRPr sz="1900" b="0">
+              <a:defRPr sz="1800" b="0">
                 <a:solidFill>
                   <a:schemeClr val="tx2"/>
                 </a:solidFill>
@@ -2326,7 +2428,7 @@
             </a:lvl1pPr>
             <a:lvl2pPr marL="457200" indent="0">
               <a:buNone/>
-              <a:defRPr sz="1900" b="1"/>
+              <a:defRPr sz="1800" b="1"/>
             </a:lvl2pPr>
             <a:lvl3pPr marL="914400" indent="0">
               <a:buNone/>
@@ -2361,7 +2463,7 @@
             <a:pPr lvl="0"/>
             <a:r>
               <a:rPr lang="en-US"/>
-              <a:t>Edit Master text styles</a:t>
+              <a:t>Click to edit Master text styles</a:t>
             </a:r>
           </a:p>
         </p:txBody>
@@ -2378,8 +2480,8 @@
         </p:nvSpPr>
         <p:spPr>
           <a:xfrm>
-            <a:off x="4754880" y="2756581"/>
-            <a:ext cx="3657600" cy="3200400"/>
+            <a:off x="6373368" y="2756581"/>
+            <a:ext cx="4754880" cy="3200400"/>
           </a:xfrm>
         </p:spPr>
         <p:txBody>
@@ -2417,7 +2519,7 @@
             <a:pPr lvl="0"/>
             <a:r>
               <a:rPr lang="en-US"/>
-              <a:t>Edit Master text styles</a:t>
+              <a:t>Click to edit Master text styles</a:t>
             </a:r>
           </a:p>
           <a:p>
@@ -2464,11 +2566,19 @@
         <p:spPr/>
         <p:txBody>
           <a:bodyPr/>
-          <a:lstStyle/>
+          <a:lstStyle>
+            <a:lvl1pPr>
+              <a:defRPr>
+                <a:solidFill>
+                  <a:schemeClr val="tx2"/>
+                </a:solidFill>
+              </a:defRPr>
+            </a:lvl1pPr>
+          </a:lstStyle>
           <a:p>
             <a:fld id="{682E5B6C-D874-45B4-A5BD-CCF67EEC8929}" type="datetimeFigureOut">
               <a:rPr lang="en-US" smtClean="0"/>
-              <a:t>2/3/2018</a:t>
+              <a:t>6/26/2024</a:t>
             </a:fld>
             <a:endParaRPr lang="en-US"/>
           </a:p>
@@ -2487,7 +2597,15 @@
         <p:spPr/>
         <p:txBody>
           <a:bodyPr/>
-          <a:lstStyle/>
+          <a:lstStyle>
+            <a:lvl1pPr>
+              <a:defRPr>
+                <a:solidFill>
+                  <a:schemeClr val="tx2"/>
+                </a:solidFill>
+              </a:defRPr>
+            </a:lvl1pPr>
+          </a:lstStyle>
           <a:p>
             <a:endParaRPr lang="en-US"/>
           </a:p>
@@ -2506,7 +2624,15 @@
         <p:spPr/>
         <p:txBody>
           <a:bodyPr/>
-          <a:lstStyle/>
+          <a:lstStyle>
+            <a:lvl1pPr>
+              <a:defRPr>
+                <a:solidFill>
+                  <a:schemeClr val="tx2"/>
+                </a:solidFill>
+              </a:defRPr>
+            </a:lvl1pPr>
+          </a:lstStyle>
           <a:p>
             <a:fld id="{12FA3C2C-542D-4D99-AE8B-F35A3E96CE86}" type="slidenum">
               <a:rPr lang="en-US" smtClean="0"/>
@@ -2519,7 +2645,7 @@
     </p:spTree>
     <p:extLst>
       <p:ext uri="{BB962C8B-B14F-4D97-AF65-F5344CB8AC3E}">
-        <p14:creationId xmlns:p14="http://schemas.microsoft.com/office/powerpoint/2010/main" val="3825243478"/>
+        <p14:creationId xmlns:p14="http://schemas.microsoft.com/office/powerpoint/2010/main" val="3748528163"/>
       </p:ext>
     </p:extLst>
   </p:cSld>
@@ -2582,11 +2708,19 @@
         <p:spPr/>
         <p:txBody>
           <a:bodyPr/>
-          <a:lstStyle/>
+          <a:lstStyle>
+            <a:lvl1pPr>
+              <a:defRPr>
+                <a:solidFill>
+                  <a:schemeClr val="tx2"/>
+                </a:solidFill>
+              </a:defRPr>
+            </a:lvl1pPr>
+          </a:lstStyle>
           <a:p>
             <a:fld id="{682E5B6C-D874-45B4-A5BD-CCF67EEC8929}" type="datetimeFigureOut">
               <a:rPr lang="en-US" smtClean="0"/>
-              <a:t>2/3/2018</a:t>
+              <a:t>6/26/2024</a:t>
             </a:fld>
             <a:endParaRPr lang="en-US"/>
           </a:p>
@@ -2605,7 +2739,15 @@
         <p:spPr/>
         <p:txBody>
           <a:bodyPr/>
-          <a:lstStyle/>
+          <a:lstStyle>
+            <a:lvl1pPr>
+              <a:defRPr>
+                <a:solidFill>
+                  <a:schemeClr val="tx2"/>
+                </a:solidFill>
+              </a:defRPr>
+            </a:lvl1pPr>
+          </a:lstStyle>
           <a:p>
             <a:endParaRPr lang="en-US"/>
           </a:p>
@@ -2624,7 +2766,15 @@
         <p:spPr/>
         <p:txBody>
           <a:bodyPr/>
-          <a:lstStyle/>
+          <a:lstStyle>
+            <a:lvl1pPr>
+              <a:defRPr>
+                <a:solidFill>
+                  <a:schemeClr val="tx2"/>
+                </a:solidFill>
+              </a:defRPr>
+            </a:lvl1pPr>
+          </a:lstStyle>
           <a:p>
             <a:fld id="{12FA3C2C-542D-4D99-AE8B-F35A3E96CE86}" type="slidenum">
               <a:rPr lang="en-US" smtClean="0"/>
@@ -2637,7 +2787,7 @@
     </p:spTree>
     <p:extLst>
       <p:ext uri="{BB962C8B-B14F-4D97-AF65-F5344CB8AC3E}">
-        <p14:creationId xmlns:p14="http://schemas.microsoft.com/office/powerpoint/2010/main" val="2417326564"/>
+        <p14:creationId xmlns:p14="http://schemas.microsoft.com/office/powerpoint/2010/main" val="915702776"/>
       </p:ext>
     </p:extLst>
   </p:cSld>
@@ -2677,11 +2827,19 @@
         <p:spPr/>
         <p:txBody>
           <a:bodyPr/>
-          <a:lstStyle/>
+          <a:lstStyle>
+            <a:lvl1pPr>
+              <a:defRPr>
+                <a:solidFill>
+                  <a:schemeClr val="tx2"/>
+                </a:solidFill>
+              </a:defRPr>
+            </a:lvl1pPr>
+          </a:lstStyle>
           <a:p>
             <a:fld id="{682E5B6C-D874-45B4-A5BD-CCF67EEC8929}" type="datetimeFigureOut">
               <a:rPr lang="en-US" smtClean="0"/>
-              <a:t>2/3/2018</a:t>
+              <a:t>6/26/2024</a:t>
             </a:fld>
             <a:endParaRPr lang="en-US"/>
           </a:p>
@@ -2700,7 +2858,15 @@
         <p:spPr/>
         <p:txBody>
           <a:bodyPr/>
-          <a:lstStyle/>
+          <a:lstStyle>
+            <a:lvl1pPr>
+              <a:defRPr>
+                <a:solidFill>
+                  <a:schemeClr val="tx2"/>
+                </a:solidFill>
+              </a:defRPr>
+            </a:lvl1pPr>
+          </a:lstStyle>
           <a:p>
             <a:endParaRPr lang="en-US"/>
           </a:p>
@@ -2719,7 +2885,15 @@
         <p:spPr/>
         <p:txBody>
           <a:bodyPr/>
-          <a:lstStyle/>
+          <a:lstStyle>
+            <a:lvl1pPr>
+              <a:defRPr>
+                <a:solidFill>
+                  <a:schemeClr val="tx2"/>
+                </a:solidFill>
+              </a:defRPr>
+            </a:lvl1pPr>
+          </a:lstStyle>
           <a:p>
             <a:fld id="{12FA3C2C-542D-4D99-AE8B-F35A3E96CE86}" type="slidenum">
               <a:rPr lang="en-US" smtClean="0"/>
@@ -2732,7 +2906,7 @@
     </p:spTree>
     <p:extLst>
       <p:ext uri="{BB962C8B-B14F-4D97-AF65-F5344CB8AC3E}">
-        <p14:creationId xmlns:p14="http://schemas.microsoft.com/office/powerpoint/2010/main" val="2750519149"/>
+        <p14:creationId xmlns:p14="http://schemas.microsoft.com/office/powerpoint/2010/main" val="3235482600"/>
       </p:ext>
     </p:extLst>
   </p:cSld>
@@ -2761,14 +2935,44 @@
       </p:grpSpPr>
       <p:sp>
         <p:nvSpPr>
-          <p:cNvPr id="13" name="Rectangle 12"/>
+          <p:cNvPr id="14" name="Rectangle 13"/>
           <p:cNvSpPr/>
           <p:nvPr/>
         </p:nvSpPr>
         <p:spPr>
           <a:xfrm>
-            <a:off x="307336" y="292608"/>
-            <a:ext cx="6163056" cy="6272784"/>
+            <a:off x="234693" y="237744"/>
+            <a:ext cx="8633081" cy="6382512"/>
+          </a:xfrm>
+          <a:prstGeom prst="rect">
+            <a:avLst/>
+          </a:prstGeom>
+          <a:solidFill>
+            <a:schemeClr val="tx1"/>
+          </a:solidFill>
+          <a:ln w="6350" cap="flat" cmpd="sng" algn="ctr">
+            <a:solidFill>
+              <a:schemeClr val="tx1">
+                <a:lumMod val="75000"/>
+              </a:schemeClr>
+            </a:solidFill>
+            <a:prstDash val="solid"/>
+          </a:ln>
+          <a:effectLst>
+            <a:softEdge rad="0"/>
+          </a:effectLst>
+        </p:spPr>
+      </p:sp>
+      <p:sp>
+        <p:nvSpPr>
+          <p:cNvPr id="16" name="Rectangle 15"/>
+          <p:cNvSpPr/>
+          <p:nvPr/>
+        </p:nvSpPr>
+        <p:spPr>
+          <a:xfrm>
+            <a:off x="371856" y="374904"/>
+            <a:ext cx="8353044" cy="6108192"/>
           </a:xfrm>
           <a:prstGeom prst="rect">
             <a:avLst/>
@@ -2776,68 +2980,13 @@
           <a:solidFill>
             <a:schemeClr val="bg2"/>
           </a:solidFill>
-          <a:ln w="6350" cap="sq">
+          <a:ln w="6350" cap="sq" cmpd="sng" algn="ctr">
             <a:noFill/>
+            <a:prstDash val="solid"/>
             <a:miter lim="800000"/>
           </a:ln>
+          <a:effectLst/>
         </p:spPr>
-        <p:style>
-          <a:lnRef idx="2">
-            <a:schemeClr val="accent1">
-              <a:shade val="50000"/>
-            </a:schemeClr>
-          </a:lnRef>
-          <a:fillRef idx="1">
-            <a:schemeClr val="accent1"/>
-          </a:fillRef>
-          <a:effectRef idx="0">
-            <a:schemeClr val="accent1"/>
-          </a:effectRef>
-          <a:fontRef idx="minor">
-            <a:schemeClr val="lt1"/>
-          </a:fontRef>
-        </p:style>
-      </p:sp>
-      <p:sp>
-        <p:nvSpPr>
-          <p:cNvPr id="16" name="Rectangle 15"/>
-          <p:cNvSpPr/>
-          <p:nvPr/>
-        </p:nvSpPr>
-        <p:spPr>
-          <a:xfrm>
-            <a:off x="184147" y="173736"/>
-            <a:ext cx="6398514" cy="6510528"/>
-          </a:xfrm>
-          <a:prstGeom prst="rect">
-            <a:avLst/>
-          </a:prstGeom>
-          <a:noFill/>
-          <a:ln w="6350">
-            <a:solidFill>
-              <a:schemeClr val="tx1">
-                <a:lumMod val="65000"/>
-                <a:lumOff val="35000"/>
-              </a:schemeClr>
-            </a:solidFill>
-          </a:ln>
-        </p:spPr>
-        <p:style>
-          <a:lnRef idx="2">
-            <a:schemeClr val="accent1">
-              <a:shade val="50000"/>
-            </a:schemeClr>
-          </a:lnRef>
-          <a:fillRef idx="1">
-            <a:schemeClr val="accent1"/>
-          </a:fillRef>
-          <a:effectRef idx="0">
-            <a:schemeClr val="accent1"/>
-          </a:effectRef>
-          <a:fontRef idx="minor">
-            <a:schemeClr val="lt1"/>
-          </a:fontRef>
-        </p:style>
       </p:sp>
       <p:sp>
         <p:nvSpPr>
@@ -2847,8 +2996,8 @@
         </p:nvSpPr>
         <p:spPr>
           <a:xfrm>
-            <a:off x="6765290" y="173736"/>
-            <a:ext cx="2194560" cy="6510528"/>
+            <a:off x="9020386" y="237744"/>
+            <a:ext cx="2926080" cy="6382512"/>
           </a:xfrm>
           <a:prstGeom prst="rect">
             <a:avLst/>
@@ -2889,8 +3038,8 @@
         </p:nvSpPr>
         <p:spPr>
           <a:xfrm>
-            <a:off x="6972300" y="607392"/>
-            <a:ext cx="1823085" cy="1645920"/>
+            <a:off x="9296400" y="607392"/>
+            <a:ext cx="2430780" cy="1645920"/>
           </a:xfrm>
         </p:spPr>
         <p:txBody>
@@ -2906,7 +3055,7 @@
                 <a:spcPct val="0"/>
               </a:spcBef>
               <a:buNone/>
-              <a:defRPr lang="en-US" sz="2400" b="0" kern="1200" cap="none" spc="0" baseline="0" dirty="0">
+              <a:defRPr lang="en-US" sz="2800" b="0" kern="1200" cap="none" spc="0" baseline="0" dirty="0">
                 <a:solidFill>
                   <a:schemeClr val="bg1"/>
                 </a:solidFill>
@@ -2938,15 +3087,15 @@
         </p:nvSpPr>
         <p:spPr>
           <a:xfrm>
-            <a:off x="668976" y="907143"/>
-            <a:ext cx="5428856" cy="5043714"/>
+            <a:off x="790575" y="704850"/>
+            <a:ext cx="7562850" cy="5143500"/>
           </a:xfrm>
         </p:spPr>
         <p:txBody>
           <a:bodyPr/>
           <a:lstStyle>
             <a:lvl1pPr>
-              <a:defRPr sz="1800"/>
+              <a:defRPr sz="1900"/>
             </a:lvl1pPr>
             <a:lvl2pPr>
               <a:defRPr sz="1600"/>
@@ -2977,7 +3126,7 @@
             <a:pPr lvl="0"/>
             <a:r>
               <a:rPr lang="en-US"/>
-              <a:t>Edit Master text styles</a:t>
+              <a:t>Click to edit Master text styles</a:t>
             </a:r>
           </a:p>
           <a:p>
@@ -3023,8 +3172,8 @@
         </p:nvSpPr>
         <p:spPr>
           <a:xfrm>
-            <a:off x="6972300" y="2286000"/>
-            <a:ext cx="1823085" cy="3505200"/>
+            <a:off x="9296400" y="2286000"/>
+            <a:ext cx="2430780" cy="3505200"/>
           </a:xfrm>
         </p:spPr>
         <p:txBody>
@@ -3040,7 +3189,7 @@
                 <a:spcPts val="800"/>
               </a:spcBef>
               <a:buNone/>
-              <a:defRPr sz="1300">
+              <a:defRPr sz="1400">
                 <a:solidFill>
                   <a:schemeClr val="bg1"/>
                 </a:solidFill>
@@ -3083,14 +3232,14 @@
             <a:pPr lvl="0"/>
             <a:r>
               <a:rPr lang="en-US"/>
-              <a:t>Edit Master text styles</a:t>
-            </a:r>
-          </a:p>
-        </p:txBody>
-      </p:sp>
-      <p:sp>
-        <p:nvSpPr>
-          <p:cNvPr id="8" name="Date Placeholder 7"/>
+              <a:t>Click to edit Master text styles</a:t>
+            </a:r>
+          </a:p>
+        </p:txBody>
+      </p:sp>
+      <p:sp>
+        <p:nvSpPr>
+          <p:cNvPr id="5" name="Date Placeholder 4"/>
           <p:cNvSpPr>
             <a:spLocks noGrp="1"/>
           </p:cNvSpPr>
@@ -3101,11 +3250,19 @@
         <p:spPr/>
         <p:txBody>
           <a:bodyPr/>
-          <a:lstStyle/>
+          <a:lstStyle>
+            <a:lvl1pPr>
+              <a:defRPr>
+                <a:solidFill>
+                  <a:schemeClr val="tx2"/>
+                </a:solidFill>
+              </a:defRPr>
+            </a:lvl1pPr>
+          </a:lstStyle>
           <a:p>
             <a:fld id="{682E5B6C-D874-45B4-A5BD-CCF67EEC8929}" type="datetimeFigureOut">
               <a:rPr lang="en-US" smtClean="0"/>
-              <a:t>2/3/2018</a:t>
+              <a:t>6/26/2024</a:t>
             </a:fld>
             <a:endParaRPr lang="en-US"/>
           </a:p>
@@ -3113,7 +3270,7 @@
       </p:sp>
       <p:sp>
         <p:nvSpPr>
-          <p:cNvPr id="9" name="Footer Placeholder 8"/>
+          <p:cNvPr id="6" name="Footer Placeholder 5"/>
           <p:cNvSpPr>
             <a:spLocks noGrp="1"/>
           </p:cNvSpPr>
@@ -3123,15 +3280,19 @@
         </p:nvSpPr>
         <p:spPr>
           <a:xfrm>
-            <a:off x="2505454" y="6265818"/>
-            <a:ext cx="3950208" cy="274320"/>
+            <a:off x="3439158" y="6214535"/>
+            <a:ext cx="5184648" cy="256032"/>
           </a:xfrm>
         </p:spPr>
         <p:txBody>
           <a:bodyPr/>
           <a:lstStyle>
             <a:lvl1pPr algn="r">
-              <a:defRPr/>
+              <a:defRPr>
+                <a:solidFill>
+                  <a:schemeClr val="tx2"/>
+                </a:solidFill>
+              </a:defRPr>
             </a:lvl1pPr>
           </a:lstStyle>
           <a:p>
@@ -3141,7 +3302,7 @@
       </p:sp>
       <p:sp>
         <p:nvSpPr>
-          <p:cNvPr id="11" name="Slide Number Placeholder 10"/>
+          <p:cNvPr id="7" name="Slide Number Placeholder 6"/>
           <p:cNvSpPr>
             <a:spLocks noGrp="1"/>
           </p:cNvSpPr>
@@ -3149,12 +3310,7 @@
             <p:ph type="sldNum" sz="quarter" idx="12"/>
           </p:nvPr>
         </p:nvSpPr>
-        <p:spPr>
-          <a:xfrm>
-            <a:off x="7795258" y="6310086"/>
-            <a:ext cx="1097280" cy="274320"/>
-          </a:xfrm>
-        </p:spPr>
+        <p:spPr/>
         <p:txBody>
           <a:bodyPr/>
           <a:lstStyle>
@@ -3177,14 +3333,14 @@
       </p:sp>
       <p:sp>
         <p:nvSpPr>
-          <p:cNvPr id="12" name="Rectangle 11"/>
+          <p:cNvPr id="11" name="Rectangle 10"/>
           <p:cNvSpPr/>
           <p:nvPr/>
         </p:nvSpPr>
         <p:spPr>
           <a:xfrm>
-            <a:off x="6884162" y="292608"/>
-            <a:ext cx="1956816" cy="6272784"/>
+            <a:off x="9157546" y="374904"/>
+            <a:ext cx="2651760" cy="6108192"/>
           </a:xfrm>
           <a:prstGeom prst="rect">
             <a:avLst/>
@@ -3220,7 +3376,7 @@
     </p:spTree>
     <p:extLst>
       <p:ext uri="{BB962C8B-B14F-4D97-AF65-F5344CB8AC3E}">
-        <p14:creationId xmlns:p14="http://schemas.microsoft.com/office/powerpoint/2010/main" val="2855926228"/>
+        <p14:creationId xmlns:p14="http://schemas.microsoft.com/office/powerpoint/2010/main" val="1677966490"/>
       </p:ext>
     </p:extLst>
   </p:cSld>
@@ -3255,8 +3411,8 @@
         </p:nvSpPr>
         <p:spPr>
           <a:xfrm>
-            <a:off x="6765290" y="173736"/>
-            <a:ext cx="2194560" cy="6510528"/>
+            <a:off x="9020386" y="237744"/>
+            <a:ext cx="2926080" cy="6382512"/>
           </a:xfrm>
           <a:prstGeom prst="rect">
             <a:avLst/>
@@ -3264,12 +3420,13 @@
           <a:solidFill>
             <a:schemeClr val="tx1"/>
           </a:solidFill>
-          <a:ln w="6350">
+          <a:ln w="6350" cap="sq">
             <a:solidFill>
               <a:schemeClr val="tx1">
                 <a:lumMod val="75000"/>
               </a:schemeClr>
             </a:solidFill>
+            <a:miter lim="800000"/>
           </a:ln>
         </p:spPr>
         <p:style>
@@ -3291,14 +3448,14 @@
       </p:sp>
       <p:sp>
         <p:nvSpPr>
-          <p:cNvPr id="11" name="Rectangle 10"/>
+          <p:cNvPr id="9" name="Rectangle 8"/>
           <p:cNvSpPr/>
           <p:nvPr/>
         </p:nvSpPr>
         <p:spPr>
           <a:xfrm>
-            <a:off x="6884162" y="292608"/>
-            <a:ext cx="1956816" cy="6272784"/>
+            <a:off x="9157546" y="374904"/>
+            <a:ext cx="2651760" cy="6108192"/>
           </a:xfrm>
           <a:prstGeom prst="rect">
             <a:avLst/>
@@ -3340,8 +3497,8 @@
         </p:nvSpPr>
         <p:spPr>
           <a:xfrm>
-            <a:off x="6972300" y="603504"/>
-            <a:ext cx="1824228" cy="1645920"/>
+            <a:off x="9296400" y="603504"/>
+            <a:ext cx="2432304" cy="1645920"/>
           </a:xfrm>
         </p:spPr>
         <p:txBody>
@@ -3350,7 +3507,7 @@
           </a:bodyPr>
           <a:lstStyle>
             <a:lvl1pPr algn="l">
-              <a:defRPr sz="2400" b="0">
+              <a:defRPr sz="2800" b="0">
                 <a:solidFill>
                   <a:schemeClr val="tx1"/>
                 </a:solidFill>
@@ -3379,14 +3536,11 @@
         </p:nvSpPr>
         <p:spPr>
           <a:xfrm>
-            <a:off x="171449" y="173736"/>
-            <a:ext cx="6398514" cy="6510528"/>
+            <a:off x="228599" y="237744"/>
+            <a:ext cx="8601076" cy="6382512"/>
           </a:xfrm>
           <a:solidFill>
-            <a:schemeClr val="bg1">
-              <a:lumMod val="50000"/>
-              <a:lumOff val="50000"/>
-            </a:schemeClr>
+            <a:srgbClr val="808080"/>
           </a:solidFill>
           <a:ln>
             <a:noFill/>
@@ -3453,8 +3607,8 @@
         </p:nvSpPr>
         <p:spPr>
           <a:xfrm>
-            <a:off x="6972300" y="2286000"/>
-            <a:ext cx="1824228" cy="3502152"/>
+            <a:off x="9296400" y="2286000"/>
+            <a:ext cx="2432304" cy="3502152"/>
           </a:xfrm>
         </p:spPr>
         <p:txBody>
@@ -3470,7 +3624,7 @@
                 <a:spcPts val="800"/>
               </a:spcBef>
               <a:buNone/>
-              <a:defRPr sz="1300">
+              <a:defRPr sz="1400">
                 <a:solidFill>
                   <a:schemeClr val="tx1"/>
                 </a:solidFill>
@@ -3513,7 +3667,7 @@
             <a:pPr lvl="0"/>
             <a:r>
               <a:rPr lang="en-US"/>
-              <a:t>Edit Master text styles</a:t>
+              <a:t>Click to edit Master text styles</a:t>
             </a:r>
           </a:p>
         </p:txBody>
@@ -3538,7 +3692,7 @@
                   <a:srgbClr val="FFFFFF"/>
                 </a:solidFill>
                 <a:effectLst>
-                  <a:outerShdw blurRad="12700" dist="6350" dir="2700000" algn="tl" rotWithShape="0">
+                  <a:outerShdw blurRad="19050" dist="6350" dir="2700000" algn="tl" rotWithShape="0">
                     <a:prstClr val="black">
                       <a:alpha val="40000"/>
                     </a:prstClr>
@@ -3550,7 +3704,7 @@
           <a:p>
             <a:fld id="{682E5B6C-D874-45B4-A5BD-CCF67EEC8929}" type="datetimeFigureOut">
               <a:rPr lang="en-US" smtClean="0"/>
-              <a:t>2/3/2018</a:t>
+              <a:t>6/26/2024</a:t>
             </a:fld>
             <a:endParaRPr lang="en-US"/>
           </a:p>
@@ -3571,12 +3725,12 @@
           <a:bodyPr/>
           <a:lstStyle>
             <a:lvl1pPr marL="0" algn="r" defTabSz="914400" rtl="0" eaLnBrk="1" latinLnBrk="0" hangingPunct="1">
-              <a:defRPr lang="en-US" sz="900" kern="1200" dirty="0">
+              <a:defRPr lang="en-US" sz="1000" kern="1200" dirty="0">
                 <a:solidFill>
                   <a:srgbClr val="FFFFFF"/>
                 </a:solidFill>
                 <a:effectLst>
-                  <a:outerShdw blurRad="12700" dist="6350" dir="2700000" algn="tl" rotWithShape="0">
+                  <a:outerShdw blurRad="19050" dist="6350" dir="2700000" algn="tl" rotWithShape="0">
                     <a:prstClr val="black">
                       <a:alpha val="40000"/>
                     </a:prstClr>
@@ -3603,12 +3757,7 @@
             <p:ph type="sldNum" sz="quarter" idx="12"/>
           </p:nvPr>
         </p:nvSpPr>
-        <p:spPr>
-          <a:xfrm>
-            <a:off x="7797546" y="6309360"/>
-            <a:ext cx="1097280" cy="274320"/>
-          </a:xfrm>
-        </p:spPr>
+        <p:spPr/>
         <p:txBody>
           <a:bodyPr/>
           <a:lstStyle>
@@ -3632,7 +3781,7 @@
     </p:spTree>
     <p:extLst>
       <p:ext uri="{BB962C8B-B14F-4D97-AF65-F5344CB8AC3E}">
-        <p14:creationId xmlns:p14="http://schemas.microsoft.com/office/powerpoint/2010/main" val="3168441591"/>
+        <p14:creationId xmlns:p14="http://schemas.microsoft.com/office/powerpoint/2010/main" val="4227741757"/>
       </p:ext>
     </p:extLst>
   </p:cSld>
@@ -3675,8 +3824,8 @@
         </p:nvSpPr>
         <p:spPr>
           <a:xfrm>
-            <a:off x="176022" y="173736"/>
-            <a:ext cx="8791956" cy="6510528"/>
+            <a:off x="234696" y="237744"/>
+            <a:ext cx="11722608" cy="6382512"/>
           </a:xfrm>
           <a:prstGeom prst="rect">
             <a:avLst/>
@@ -3699,14 +3848,14 @@
       </p:sp>
       <p:sp>
         <p:nvSpPr>
-          <p:cNvPr id="9" name="Rectangle 8"/>
+          <p:cNvPr id="8" name="Rectangle 7"/>
           <p:cNvSpPr/>
           <p:nvPr/>
         </p:nvSpPr>
         <p:spPr>
           <a:xfrm>
-            <a:off x="292608" y="292608"/>
-            <a:ext cx="8558784" cy="6272784"/>
+            <a:off x="371856" y="374904"/>
+            <a:ext cx="11448288" cy="6108192"/>
           </a:xfrm>
           <a:prstGeom prst="rect">
             <a:avLst/>
@@ -3734,8 +3883,8 @@
         </p:nvSpPr>
         <p:spPr>
           <a:xfrm>
-            <a:off x="731520" y="642594"/>
-            <a:ext cx="7680960" cy="1371600"/>
+            <a:off x="1066800" y="642594"/>
+            <a:ext cx="10058400" cy="1371600"/>
           </a:xfrm>
           <a:prstGeom prst="rect">
             <a:avLst/>
@@ -3767,8 +3916,8 @@
         </p:nvSpPr>
         <p:spPr>
           <a:xfrm>
-            <a:off x="731520" y="2103120"/>
-            <a:ext cx="7680960" cy="3931920"/>
+            <a:off x="1066800" y="2103120"/>
+            <a:ext cx="10058400" cy="3931920"/>
           </a:xfrm>
           <a:prstGeom prst="rect">
             <a:avLst/>
@@ -3783,7 +3932,7 @@
             <a:pPr lvl="0"/>
             <a:r>
               <a:rPr lang="en-US"/>
-              <a:t>Edit Master text styles</a:t>
+              <a:t>Click to edit Master text styles</a:t>
             </a:r>
           </a:p>
           <a:p>
@@ -3829,8 +3978,8 @@
         </p:nvSpPr>
         <p:spPr>
           <a:xfrm>
-            <a:off x="307338" y="6265818"/>
-            <a:ext cx="2057400" cy="274320"/>
+            <a:off x="389464" y="6214535"/>
+            <a:ext cx="2743200" cy="256032"/>
           </a:xfrm>
           <a:prstGeom prst="rect">
             <a:avLst/>
@@ -3840,9 +3989,9 @@
           <a:bodyPr vert="horz" lIns="91440" tIns="45720" rIns="91440" bIns="45720" rtlCol="0" anchor="b"/>
           <a:lstStyle>
             <a:lvl1pPr algn="l">
-              <a:defRPr sz="900">
-                <a:solidFill>
-                  <a:schemeClr val="tx2"/>
+              <a:defRPr sz="1000">
+                <a:solidFill>
+                  <a:schemeClr val="bg2"/>
                 </a:solidFill>
               </a:defRPr>
             </a:lvl1pPr>
@@ -3850,7 +3999,7 @@
           <a:p>
             <a:fld id="{682E5B6C-D874-45B4-A5BD-CCF67EEC8929}" type="datetimeFigureOut">
               <a:rPr lang="en-US" smtClean="0"/>
-              <a:t>2/3/2018</a:t>
+              <a:t>6/26/2024</a:t>
             </a:fld>
             <a:endParaRPr lang="en-US"/>
           </a:p>
@@ -3868,8 +4017,8 @@
         </p:nvSpPr>
         <p:spPr>
           <a:xfrm>
-            <a:off x="2596896" y="6265818"/>
-            <a:ext cx="3950208" cy="274320"/>
+            <a:off x="3489960" y="6214535"/>
+            <a:ext cx="5212080" cy="256032"/>
           </a:xfrm>
           <a:prstGeom prst="rect">
             <a:avLst/>
@@ -3879,9 +4028,9 @@
           <a:bodyPr vert="horz" lIns="91440" tIns="45720" rIns="91440" bIns="45720" rtlCol="0" anchor="b"/>
           <a:lstStyle>
             <a:lvl1pPr algn="ctr">
-              <a:defRPr sz="900">
-                <a:solidFill>
-                  <a:schemeClr val="tx2"/>
+              <a:defRPr sz="1000">
+                <a:solidFill>
+                  <a:schemeClr val="bg2"/>
                 </a:solidFill>
               </a:defRPr>
             </a:lvl1pPr>
@@ -3903,8 +4052,8 @@
         </p:nvSpPr>
         <p:spPr>
           <a:xfrm>
-            <a:off x="7743555" y="6265818"/>
-            <a:ext cx="1097280" cy="274320"/>
+            <a:off x="10348535" y="6214535"/>
+            <a:ext cx="1463040" cy="256032"/>
           </a:xfrm>
           <a:prstGeom prst="rect">
             <a:avLst/>
@@ -3914,9 +4063,9 @@
           <a:bodyPr vert="horz" lIns="91440" tIns="45720" rIns="91440" bIns="45720" rtlCol="0" anchor="b"/>
           <a:lstStyle>
             <a:lvl1pPr algn="r">
-              <a:defRPr sz="900">
-                <a:solidFill>
-                  <a:schemeClr val="tx2"/>
+              <a:defRPr sz="1000">
+                <a:solidFill>
+                  <a:schemeClr val="bg2"/>
                 </a:solidFill>
               </a:defRPr>
             </a:lvl1pPr>
@@ -3933,23 +4082,23 @@
     </p:spTree>
     <p:extLst>
       <p:ext uri="{BB962C8B-B14F-4D97-AF65-F5344CB8AC3E}">
-        <p14:creationId xmlns:p14="http://schemas.microsoft.com/office/powerpoint/2010/main" val="3136980380"/>
+        <p14:creationId xmlns:p14="http://schemas.microsoft.com/office/powerpoint/2010/main" val="268021502"/>
       </p:ext>
     </p:extLst>
   </p:cSld>
   <p:clrMap bg1="dk1" tx1="lt1" bg2="dk2" tx2="lt2" accent1="accent1" accent2="accent2" accent3="accent3" accent4="accent4" accent5="accent5" accent6="accent6" hlink="hlink" folHlink="folHlink"/>
   <p:sldLayoutIdLst>
-    <p:sldLayoutId id="2147483685" r:id="rId1"/>
-    <p:sldLayoutId id="2147483686" r:id="rId2"/>
-    <p:sldLayoutId id="2147483687" r:id="rId3"/>
-    <p:sldLayoutId id="2147483688" r:id="rId4"/>
-    <p:sldLayoutId id="2147483689" r:id="rId5"/>
-    <p:sldLayoutId id="2147483690" r:id="rId6"/>
-    <p:sldLayoutId id="2147483691" r:id="rId7"/>
-    <p:sldLayoutId id="2147483692" r:id="rId8"/>
-    <p:sldLayoutId id="2147483693" r:id="rId9"/>
-    <p:sldLayoutId id="2147483694" r:id="rId10"/>
-    <p:sldLayoutId id="2147483695" r:id="rId11"/>
+    <p:sldLayoutId id="2147483697" r:id="rId1"/>
+    <p:sldLayoutId id="2147483698" r:id="rId2"/>
+    <p:sldLayoutId id="2147483699" r:id="rId3"/>
+    <p:sldLayoutId id="2147483700" r:id="rId4"/>
+    <p:sldLayoutId id="2147483701" r:id="rId5"/>
+    <p:sldLayoutId id="2147483702" r:id="rId6"/>
+    <p:sldLayoutId id="2147483703" r:id="rId7"/>
+    <p:sldLayoutId id="2147483704" r:id="rId8"/>
+    <p:sldLayoutId id="2147483705" r:id="rId9"/>
+    <p:sldLayoutId id="2147483706" r:id="rId10"/>
+    <p:sldLayoutId id="2147483707" r:id="rId11"/>
   </p:sldLayoutIdLst>
   <p:txStyles>
     <p:titleStyle>
@@ -3961,7 +4110,7 @@
           <a:spcPct val="0"/>
         </a:spcBef>
         <a:buNone/>
-        <a:defRPr lang="en-US" sz="4000" kern="1200" cap="none" spc="0" baseline="0" dirty="0">
+        <a:defRPr lang="en-US" sz="4800" kern="1200" cap="none" spc="0" baseline="0" dirty="0">
           <a:solidFill>
             <a:schemeClr val="tx1"/>
           </a:solidFill>
@@ -3989,7 +4138,7 @@
             <a:lumOff val="40000"/>
           </a:schemeClr>
         </a:buClr>
-        <a:buFont typeface="Arial" panose="020B0604020202020204" pitchFamily="34" charset="0"/>
+        <a:buFont typeface="Arial" pitchFamily="34" charset="0"/>
         <a:buChar char="•"/>
         <a:defRPr sz="1800" kern="1200">
           <a:solidFill>
@@ -4013,7 +4162,7 @@
             <a:lumOff val="40000"/>
           </a:schemeClr>
         </a:buClr>
-        <a:buFont typeface="Arial" panose="020B0604020202020204" pitchFamily="34" charset="0"/>
+        <a:buFont typeface="Arial" pitchFamily="34" charset="0"/>
         <a:buChar char="•"/>
         <a:defRPr sz="1600" kern="1200">
           <a:solidFill>
@@ -4037,7 +4186,7 @@
             <a:lumOff val="40000"/>
           </a:schemeClr>
         </a:buClr>
-        <a:buFont typeface="Arial" panose="020B0604020202020204" pitchFamily="34" charset="0"/>
+        <a:buFont typeface="Arial" pitchFamily="34" charset="0"/>
         <a:buChar char="•"/>
         <a:defRPr sz="1400" kern="1200">
           <a:solidFill>
@@ -4061,7 +4210,7 @@
             <a:lumOff val="40000"/>
           </a:schemeClr>
         </a:buClr>
-        <a:buFont typeface="Arial" panose="020B0604020202020204" pitchFamily="34" charset="0"/>
+        <a:buFont typeface="Arial" pitchFamily="34" charset="0"/>
         <a:buChar char="•"/>
         <a:defRPr sz="1400" kern="1200">
           <a:solidFill>
@@ -4085,7 +4234,7 @@
             <a:lumOff val="40000"/>
           </a:schemeClr>
         </a:buClr>
-        <a:buFont typeface="Arial" panose="020B0604020202020204" pitchFamily="34" charset="0"/>
+        <a:buFont typeface="Arial" pitchFamily="34" charset="0"/>
         <a:buChar char="•"/>
         <a:defRPr sz="1400" kern="1200">
           <a:solidFill>
@@ -4109,7 +4258,7 @@
             <a:lumOff val="40000"/>
           </a:schemeClr>
         </a:buClr>
-        <a:buFont typeface="Arial" panose="020B0604020202020204" pitchFamily="34" charset="0"/>
+        <a:buFont typeface="Arial" pitchFamily="34" charset="0"/>
         <a:buChar char="•"/>
         <a:defRPr sz="1400" kern="1200">
           <a:solidFill>
@@ -4133,7 +4282,7 @@
             <a:lumOff val="40000"/>
           </a:schemeClr>
         </a:buClr>
-        <a:buFont typeface="Arial" panose="020B0604020202020204" pitchFamily="34" charset="0"/>
+        <a:buFont typeface="Arial" pitchFamily="34" charset="0"/>
         <a:buChar char="•"/>
         <a:defRPr sz="1400" kern="1200">
           <a:solidFill>
@@ -4157,7 +4306,7 @@
             <a:lumOff val="40000"/>
           </a:schemeClr>
         </a:buClr>
-        <a:buFont typeface="Arial" panose="020B0604020202020204" pitchFamily="34" charset="0"/>
+        <a:buFont typeface="Arial" pitchFamily="34" charset="0"/>
         <a:buChar char="•"/>
         <a:defRPr sz="1400" kern="1200">
           <a:solidFill>
@@ -4181,7 +4330,7 @@
             <a:lumOff val="40000"/>
           </a:schemeClr>
         </a:buClr>
-        <a:buFont typeface="Arial" panose="020B0604020202020204" pitchFamily="34" charset="0"/>
+        <a:buFont typeface="Arial" pitchFamily="34" charset="0"/>
         <a:buChar char="•"/>
         <a:defRPr sz="1400" kern="1200">
           <a:solidFill>
@@ -4332,13 +4481,13 @@
           <a:p>
             <a:pPr algn="ctr"/>
             <a:r>
-              <a:rPr lang="zh-CN" altLang="en-US" b="1" dirty="0">
+              <a:rPr lang="zh-CN" altLang="en-US" b="1" i="1" dirty="0">
                 <a:latin typeface="Microsoft JhengHei" panose="020B0604030504040204" pitchFamily="34" charset="-120"/>
                 <a:ea typeface="Microsoft JhengHei" panose="020B0604030504040204" pitchFamily="34" charset="-120"/>
               </a:rPr>
               <a:t>野地百合花</a:t>
             </a:r>
-            <a:endParaRPr lang="en-US" b="1" dirty="0">
+            <a:endParaRPr lang="en-US" b="1" i="1" dirty="0">
               <a:latin typeface="Microsoft JhengHei" panose="020B0604030504040204" pitchFamily="34" charset="-120"/>
               <a:ea typeface="Microsoft JhengHei" panose="020B0604030504040204" pitchFamily="34" charset="-120"/>
             </a:endParaRPr>
@@ -4361,10 +4510,15 @@
             <p:ph idx="1"/>
           </p:nvPr>
         </p:nvSpPr>
-        <p:spPr/>
+        <p:spPr>
+          <a:xfrm>
+            <a:off x="1066800" y="2103120"/>
+            <a:ext cx="10058400" cy="4271554"/>
+          </a:xfrm>
+        </p:spPr>
         <p:txBody>
           <a:bodyPr>
-            <a:normAutofit/>
+            <a:normAutofit lnSpcReduction="10000"/>
           </a:bodyPr>
           <a:lstStyle/>
           <a:p>
@@ -4372,13 +4526,13 @@
               <a:buNone/>
             </a:pPr>
             <a:r>
-              <a:rPr lang="zh-CN" altLang="en-US" sz="5400" b="1" dirty="0">
+              <a:rPr lang="zh-CN" altLang="en-US" sz="6600" b="1" dirty="0">
                 <a:latin typeface="Microsoft JhengHei" panose="020B0604030504040204" pitchFamily="34" charset="-120"/>
                 <a:ea typeface="Microsoft JhengHei" panose="020B0604030504040204" pitchFamily="34" charset="-120"/>
               </a:rPr>
               <a:t>請看   野地百合花</a:t>
             </a:r>
-            <a:endParaRPr lang="en-US" altLang="zh-CN" sz="5400" b="1" dirty="0">
+            <a:endParaRPr lang="en-US" altLang="zh-CN" sz="6600" b="1" dirty="0">
               <a:latin typeface="Microsoft JhengHei" panose="020B0604030504040204" pitchFamily="34" charset="-120"/>
               <a:ea typeface="Microsoft JhengHei" panose="020B0604030504040204" pitchFamily="34" charset="-120"/>
             </a:endParaRPr>
@@ -4388,13 +4542,13 @@
               <a:buNone/>
             </a:pPr>
             <a:r>
-              <a:rPr lang="zh-CN" altLang="en-US" sz="5400" b="1" dirty="0">
+              <a:rPr lang="zh-CN" altLang="en-US" sz="6600" b="1" dirty="0">
                 <a:latin typeface="Microsoft JhengHei" panose="020B0604030504040204" pitchFamily="34" charset="-120"/>
                 <a:ea typeface="Microsoft JhengHei" panose="020B0604030504040204" pitchFamily="34" charset="-120"/>
               </a:rPr>
               <a:t>誰在細細照顧它們</a:t>
             </a:r>
-            <a:endParaRPr lang="en-US" altLang="zh-CN" sz="5400" b="1" dirty="0">
+            <a:endParaRPr lang="en-US" altLang="zh-CN" sz="6600" b="1" dirty="0">
               <a:latin typeface="Microsoft JhengHei" panose="020B0604030504040204" pitchFamily="34" charset="-120"/>
               <a:ea typeface="Microsoft JhengHei" panose="020B0604030504040204" pitchFamily="34" charset="-120"/>
             </a:endParaRPr>
@@ -4404,13 +4558,13 @@
               <a:buNone/>
             </a:pPr>
             <a:r>
-              <a:rPr lang="zh-CN" altLang="en-US" sz="5400" b="1" dirty="0">
+              <a:rPr lang="zh-CN" altLang="en-US" sz="6600" b="1" dirty="0">
                 <a:latin typeface="Microsoft JhengHei" panose="020B0604030504040204" pitchFamily="34" charset="-120"/>
                 <a:ea typeface="Microsoft JhengHei" panose="020B0604030504040204" pitchFamily="34" charset="-120"/>
               </a:rPr>
               <a:t>請看   天上飛鳥</a:t>
             </a:r>
-            <a:endParaRPr lang="en-US" altLang="zh-CN" sz="5400" b="1" dirty="0">
+            <a:endParaRPr lang="en-US" altLang="zh-CN" sz="6600" b="1" dirty="0">
               <a:latin typeface="Microsoft JhengHei" panose="020B0604030504040204" pitchFamily="34" charset="-120"/>
               <a:ea typeface="Microsoft JhengHei" panose="020B0604030504040204" pitchFamily="34" charset="-120"/>
             </a:endParaRPr>
@@ -4420,13 +4574,13 @@
               <a:buNone/>
             </a:pPr>
             <a:r>
-              <a:rPr lang="zh-CN" altLang="en-US" sz="5400" b="1" dirty="0">
+              <a:rPr lang="zh-CN" altLang="en-US" sz="6600" b="1" dirty="0">
                 <a:latin typeface="Microsoft JhengHei" panose="020B0604030504040204" pitchFamily="34" charset="-120"/>
                 <a:ea typeface="Microsoft JhengHei" panose="020B0604030504040204" pitchFamily="34" charset="-120"/>
               </a:rPr>
               <a:t>誰在養活牠們</a:t>
             </a:r>
-            <a:endParaRPr lang="en-US" sz="5400" b="1" dirty="0">
+            <a:endParaRPr lang="en-US" sz="6600" b="1" dirty="0">
               <a:latin typeface="Microsoft JhengHei" panose="020B0604030504040204" pitchFamily="34" charset="-120"/>
               <a:ea typeface="Microsoft JhengHei" panose="020B0604030504040204" pitchFamily="34" charset="-120"/>
             </a:endParaRPr>
@@ -4486,13 +4640,13 @@
           <a:p>
             <a:pPr algn="ctr"/>
             <a:r>
-              <a:rPr lang="zh-CN" altLang="en-US" b="1" dirty="0">
+              <a:rPr lang="zh-CN" altLang="en-US" b="1" i="1" dirty="0">
                 <a:latin typeface="Microsoft JhengHei" panose="020B0604030504040204" pitchFamily="34" charset="-120"/>
                 <a:ea typeface="Microsoft JhengHei" panose="020B0604030504040204" pitchFamily="34" charset="-120"/>
               </a:rPr>
               <a:t>野地百合花</a:t>
             </a:r>
-            <a:endParaRPr lang="en-US" b="1" dirty="0">
+            <a:endParaRPr lang="en-US" b="1" i="1" dirty="0">
               <a:latin typeface="Microsoft JhengHei" panose="020B0604030504040204" pitchFamily="34" charset="-120"/>
               <a:ea typeface="Microsoft JhengHei" panose="020B0604030504040204" pitchFamily="34" charset="-120"/>
             </a:endParaRPr>
@@ -4515,7 +4669,12 @@
             <p:ph idx="1"/>
           </p:nvPr>
         </p:nvSpPr>
-        <p:spPr/>
+        <p:spPr>
+          <a:xfrm>
+            <a:off x="1066800" y="2103120"/>
+            <a:ext cx="10058400" cy="4323806"/>
+          </a:xfrm>
+        </p:spPr>
         <p:txBody>
           <a:bodyPr>
             <a:normAutofit/>
@@ -4526,13 +4685,13 @@
               <a:buNone/>
             </a:pPr>
             <a:r>
-              <a:rPr lang="zh-CN" altLang="en-US" sz="5400" b="1" dirty="0">
+              <a:rPr lang="zh-CN" altLang="en-US" sz="6600" b="1" dirty="0">
                 <a:latin typeface="Microsoft JhengHei" panose="020B0604030504040204" pitchFamily="34" charset="-120"/>
                 <a:ea typeface="Microsoft JhengHei" panose="020B0604030504040204" pitchFamily="34" charset="-120"/>
               </a:rPr>
               <a:t>我們是天父所愛的兒女</a:t>
             </a:r>
-            <a:endParaRPr lang="en-US" altLang="zh-CN" sz="5400" b="1" dirty="0">
+            <a:endParaRPr lang="en-US" altLang="zh-CN" sz="6600" b="1" dirty="0">
               <a:latin typeface="Microsoft JhengHei" panose="020B0604030504040204" pitchFamily="34" charset="-120"/>
               <a:ea typeface="Microsoft JhengHei" panose="020B0604030504040204" pitchFamily="34" charset="-120"/>
             </a:endParaRPr>
@@ -4542,27 +4701,27 @@
               <a:buNone/>
             </a:pPr>
             <a:r>
-              <a:rPr lang="zh-CN" altLang="en-US" sz="5400" b="1" dirty="0">
+              <a:rPr lang="zh-CN" altLang="en-US" sz="4800" b="1" dirty="0">
                 <a:latin typeface="Microsoft JhengHei" panose="020B0604030504040204" pitchFamily="34" charset="-120"/>
                 <a:ea typeface="Microsoft JhengHei" panose="020B0604030504040204" pitchFamily="34" charset="-120"/>
               </a:rPr>
               <a:t>（</a:t>
             </a:r>
             <a:r>
-              <a:rPr lang="en-US" altLang="zh-CN" sz="5400" b="1" dirty="0">
+              <a:rPr lang="en-US" altLang="zh-CN" sz="4800" b="1" dirty="0">
                 <a:latin typeface="Microsoft JhengHei" panose="020B0604030504040204" pitchFamily="34" charset="-120"/>
                 <a:ea typeface="Microsoft JhengHei" panose="020B0604030504040204" pitchFamily="34" charset="-120"/>
               </a:rPr>
               <a:t>x2</a:t>
             </a:r>
             <a:r>
-              <a:rPr lang="zh-CN" altLang="en-US" sz="5400" b="1" dirty="0">
+              <a:rPr lang="zh-CN" altLang="en-US" sz="4800" b="1" dirty="0">
                 <a:latin typeface="Microsoft JhengHei" panose="020B0604030504040204" pitchFamily="34" charset="-120"/>
                 <a:ea typeface="Microsoft JhengHei" panose="020B0604030504040204" pitchFamily="34" charset="-120"/>
               </a:rPr>
               <a:t>）</a:t>
             </a:r>
-            <a:endParaRPr lang="en-US" altLang="zh-CN" sz="5400" b="1" dirty="0">
+            <a:endParaRPr lang="en-US" altLang="zh-CN" sz="4800" b="1" dirty="0">
               <a:latin typeface="Microsoft JhengHei" panose="020B0604030504040204" pitchFamily="34" charset="-120"/>
               <a:ea typeface="Microsoft JhengHei" panose="020B0604030504040204" pitchFamily="34" charset="-120"/>
             </a:endParaRPr>
@@ -4572,13 +4731,13 @@
               <a:buNone/>
             </a:pPr>
             <a:r>
-              <a:rPr lang="zh-CN" altLang="en-US" sz="5400" b="1" dirty="0">
+              <a:rPr lang="zh-CN" altLang="en-US" sz="6600" b="1" dirty="0">
                 <a:latin typeface="Microsoft JhengHei" panose="020B0604030504040204" pitchFamily="34" charset="-120"/>
                 <a:ea typeface="Microsoft JhengHei" panose="020B0604030504040204" pitchFamily="34" charset="-120"/>
               </a:rPr>
               <a:t>什麼事叫我們擔憂</a:t>
             </a:r>
-            <a:endParaRPr lang="en-US" altLang="zh-CN" sz="5400" b="1" dirty="0">
+            <a:endParaRPr lang="en-US" altLang="zh-CN" sz="6600" b="1" dirty="0">
               <a:latin typeface="Microsoft JhengHei" panose="020B0604030504040204" pitchFamily="34" charset="-120"/>
               <a:ea typeface="Microsoft JhengHei" panose="020B0604030504040204" pitchFamily="34" charset="-120"/>
             </a:endParaRPr>
@@ -4588,13 +4747,13 @@
               <a:buNone/>
             </a:pPr>
             <a:r>
-              <a:rPr lang="zh-CN" altLang="en-US" sz="5400" b="1" dirty="0">
+              <a:rPr lang="zh-CN" altLang="en-US" sz="6600" b="1" dirty="0">
                 <a:latin typeface="Microsoft JhengHei" panose="020B0604030504040204" pitchFamily="34" charset="-120"/>
                 <a:ea typeface="Microsoft JhengHei" panose="020B0604030504040204" pitchFamily="34" charset="-120"/>
               </a:rPr>
               <a:t>將一切事交託給主</a:t>
             </a:r>
-            <a:endParaRPr lang="en-US" sz="5400" b="1" dirty="0">
+            <a:endParaRPr lang="en-US" sz="6600" b="1" dirty="0">
               <a:latin typeface="Microsoft JhengHei" panose="020B0604030504040204" pitchFamily="34" charset="-120"/>
               <a:ea typeface="Microsoft JhengHei" panose="020B0604030504040204" pitchFamily="34" charset="-120"/>
             </a:endParaRPr>
